--- a/p03/A-frame-Boolean-operations.pptx
+++ b/p03/A-frame-Boolean-operations.pptx
@@ -207,7 +207,7 @@
           <a:p>
             <a:fld id="{FA1E3CD0-6E24-4AC0-945A-82AEC1490673}" type="datetimeFigureOut">
               <a:rPr lang="en-US" smtClean="0"/>
-              <a:t>10/24/2025</a:t>
+              <a:t>1/6/2026</a:t>
             </a:fld>
             <a:endParaRPr lang="en-US"/>
           </a:p>
@@ -605,7 +605,7 @@
           <a:p>
             <a:fld id="{846CE7D5-CF57-46EF-B807-FDD0502418D4}" type="datetimeFigureOut">
               <a:rPr lang="en-US" smtClean="0"/>
-              <a:t>10/24/2025</a:t>
+              <a:t>1/6/2026</a:t>
             </a:fld>
             <a:endParaRPr lang="en-US"/>
           </a:p>
@@ -775,7 +775,7 @@
           <a:p>
             <a:fld id="{846CE7D5-CF57-46EF-B807-FDD0502418D4}" type="datetimeFigureOut">
               <a:rPr lang="en-US" smtClean="0"/>
-              <a:t>10/24/2025</a:t>
+              <a:t>1/6/2026</a:t>
             </a:fld>
             <a:endParaRPr lang="en-US"/>
           </a:p>
@@ -955,7 +955,7 @@
           <a:p>
             <a:fld id="{846CE7D5-CF57-46EF-B807-FDD0502418D4}" type="datetimeFigureOut">
               <a:rPr lang="en-US" smtClean="0"/>
-              <a:t>10/24/2025</a:t>
+              <a:t>1/6/2026</a:t>
             </a:fld>
             <a:endParaRPr lang="en-US"/>
           </a:p>
@@ -1125,7 +1125,7 @@
           <a:p>
             <a:fld id="{846CE7D5-CF57-46EF-B807-FDD0502418D4}" type="datetimeFigureOut">
               <a:rPr lang="en-US" smtClean="0"/>
-              <a:t>10/24/2025</a:t>
+              <a:t>1/6/2026</a:t>
             </a:fld>
             <a:endParaRPr lang="en-US"/>
           </a:p>
@@ -1371,7 +1371,7 @@
           <a:p>
             <a:fld id="{846CE7D5-CF57-46EF-B807-FDD0502418D4}" type="datetimeFigureOut">
               <a:rPr lang="en-US" smtClean="0"/>
-              <a:t>10/24/2025</a:t>
+              <a:t>1/6/2026</a:t>
             </a:fld>
             <a:endParaRPr lang="en-US"/>
           </a:p>
@@ -1603,7 +1603,7 @@
           <a:p>
             <a:fld id="{846CE7D5-CF57-46EF-B807-FDD0502418D4}" type="datetimeFigureOut">
               <a:rPr lang="en-US" smtClean="0"/>
-              <a:t>10/24/2025</a:t>
+              <a:t>1/6/2026</a:t>
             </a:fld>
             <a:endParaRPr lang="en-US"/>
           </a:p>
@@ -1970,7 +1970,7 @@
           <a:p>
             <a:fld id="{846CE7D5-CF57-46EF-B807-FDD0502418D4}" type="datetimeFigureOut">
               <a:rPr lang="en-US" smtClean="0"/>
-              <a:t>10/24/2025</a:t>
+              <a:t>1/6/2026</a:t>
             </a:fld>
             <a:endParaRPr lang="en-US"/>
           </a:p>
@@ -2088,7 +2088,7 @@
           <a:p>
             <a:fld id="{846CE7D5-CF57-46EF-B807-FDD0502418D4}" type="datetimeFigureOut">
               <a:rPr lang="en-US" smtClean="0"/>
-              <a:t>10/24/2025</a:t>
+              <a:t>1/6/2026</a:t>
             </a:fld>
             <a:endParaRPr lang="en-US"/>
           </a:p>
@@ -2183,7 +2183,7 @@
           <a:p>
             <a:fld id="{846CE7D5-CF57-46EF-B807-FDD0502418D4}" type="datetimeFigureOut">
               <a:rPr lang="en-US" smtClean="0"/>
-              <a:t>10/24/2025</a:t>
+              <a:t>1/6/2026</a:t>
             </a:fld>
             <a:endParaRPr lang="en-US"/>
           </a:p>
@@ -2460,7 +2460,7 @@
           <a:p>
             <a:fld id="{846CE7D5-CF57-46EF-B807-FDD0502418D4}" type="datetimeFigureOut">
               <a:rPr lang="en-US" smtClean="0"/>
-              <a:t>10/24/2025</a:t>
+              <a:t>1/6/2026</a:t>
             </a:fld>
             <a:endParaRPr lang="en-US"/>
           </a:p>
@@ -2717,7 +2717,7 @@
           <a:p>
             <a:fld id="{846CE7D5-CF57-46EF-B807-FDD0502418D4}" type="datetimeFigureOut">
               <a:rPr lang="en-US" smtClean="0"/>
-              <a:t>10/24/2025</a:t>
+              <a:t>1/6/2026</a:t>
             </a:fld>
             <a:endParaRPr lang="en-US"/>
           </a:p>
@@ -2930,7 +2930,7 @@
           <a:p>
             <a:fld id="{846CE7D5-CF57-46EF-B807-FDD0502418D4}" type="datetimeFigureOut">
               <a:rPr lang="en-US" smtClean="0"/>
-              <a:t>10/24/2025</a:t>
+              <a:t>1/6/2026</a:t>
             </a:fld>
             <a:endParaRPr lang="en-US"/>
           </a:p>
@@ -5178,7 +5178,34 @@
             <a:pPr marL="0" indent="0">
               <a:buNone/>
             </a:pPr>
-            <a:endParaRPr lang="en-US" dirty="0"/>
+            <a:r>
+              <a:rPr lang="en-US" dirty="0"/>
+              <a:t>	Red: color=“</a:t>
+            </a:r>
+            <a:r>
+              <a:rPr lang="en-US" dirty="0">
+                <a:solidFill>
+                  <a:srgbClr val="FF0000"/>
+                </a:solidFill>
+              </a:rPr>
+              <a:t>FF</a:t>
+            </a:r>
+            <a:r>
+              <a:rPr lang="en-US" dirty="0"/>
+              <a:t>0000”, blue: color=“00</a:t>
+            </a:r>
+            <a:r>
+              <a:rPr lang="en-US" dirty="0">
+                <a:solidFill>
+                  <a:schemeClr val="accent1"/>
+                </a:solidFill>
+              </a:rPr>
+              <a:t>FF</a:t>
+            </a:r>
+            <a:r>
+              <a:rPr lang="en-US" dirty="0"/>
+              <a:t>00”</a:t>
+            </a:r>
           </a:p>
           <a:p>
             <a:pPr marL="0" indent="0">
